--- a/Organogramas_Times.pptx
+++ b/Organogramas_Times.pptx
@@ -5,8 +5,8 @@
     <p:sldMasterId id="2147483648" r:id="rId1"/>
   </p:sldMasterIdLst>
   <p:sldIdLst>
+    <p:sldId id="257" r:id="rId8"/>
     <p:sldId id="256" r:id="rId2"/>
-    <p:sldId id="257" r:id="rId8"/>
   </p:sldIdLst>
   <p:notesMasterIdLst>
     <p:notesMasterId r:id="rId3"/>
